--- a/VoxLog_Presentation.pptx
+++ b/VoxLog_Presentation.pptx
@@ -6263,8 +6263,10 @@
           <a:lstStyle/>
           <a:p>
             <a:r>
+              <a:rPr dirty="0" err="1"/>
               <a:t>VoxLog</a:t>
             </a:r>
+            <a:endParaRPr dirty="0"/>
           </a:p>
         </p:txBody>
       </p:sp>
@@ -6281,26 +6283,17 @@
         <p:spPr/>
         <p:txBody>
           <a:bodyPr>
-            <a:normAutofit fontScale="32500" lnSpcReduction="20000"/>
+            <a:normAutofit/>
           </a:bodyPr>
           <a:lstStyle/>
           <a:p>
             <a:r>
+              <a:rPr dirty="0"/>
               <a:t>Intelligent Voice Recognition Attendance &amp; Academic Management System</a:t>
             </a:r>
           </a:p>
           <a:p>
-            <a:endParaRPr/>
-          </a:p>
-          <a:p>
-            <a:r>
-              <a:t>Presenter: [Your Name/Team Name]</a:t>
-            </a:r>
-          </a:p>
-          <a:p>
-            <a:r>
-              <a:t>Project Context: Next-Generation Classroom Automation</a:t>
-            </a:r>
+            <a:endParaRPr dirty="0"/>
           </a:p>
         </p:txBody>
       </p:sp>
@@ -6442,23 +6435,32 @@
             <p:ph idx="1"/>
           </p:nvPr>
         </p:nvSpPr>
-        <p:spPr/>
-        <p:txBody>
-          <a:bodyPr/>
-          <a:lstStyle/>
-          <a:p>
-            <a:r>
-              <a:t>Time-Consuming: Manual roll calls waste valuable instructional time (10-15 minutes per class).</a:t>
-            </a:r>
-          </a:p>
-          <a:p>
-            <a:r>
-              <a:t>Proxy Attendance: Traditional methods are highly prone to buddy-punching or fake proxies.</a:t>
-            </a:r>
-          </a:p>
-          <a:p>
-            <a:r>
-              <a:t>Administrative Burden: Manual entry of attendance data into digital systems is tedious and error-prone.</a:t>
+        <p:spPr>
+          <a:xfrm>
+            <a:off x="719545" y="2765417"/>
+            <a:ext cx="3675474" cy="1376075"/>
+          </a:xfrm>
+        </p:spPr>
+        <p:txBody>
+          <a:bodyPr/>
+          <a:lstStyle/>
+          <a:p>
+            <a:r>
+              <a:rPr dirty="0"/>
+              <a:t>Time-Consuming</a:t>
+            </a:r>
+          </a:p>
+          <a:p>
+            <a:r>
+              <a:rPr dirty="0"/>
+              <a:t>Proxy Attendance</a:t>
+            </a:r>
+            <a:endParaRPr lang="en-US" dirty="0"/>
+          </a:p>
+          <a:p>
+            <a:r>
+              <a:rPr dirty="0"/>
+              <a:t>Administrative Burden</a:t>
             </a:r>
           </a:p>
         </p:txBody>
